--- a/Comp_Vis_slides.pptx
+++ b/Comp_Vis_slides.pptx
@@ -1786,7 +1786,7 @@
           <a:p>
             <a:fld id="{5BCAD085-E8A6-8845-BD4E-CB4CCA059FC4}" type="datetimeFigureOut">
               <a:rPr lang="en-US" smtClean="0"/>
-              <a:t>5/15/26</a:t>
+              <a:t>5/18/26</a:t>
             </a:fld>
             <a:endParaRPr lang="en-US"/>
           </a:p>
@@ -1954,7 +1954,7 @@
           <a:p>
             <a:fld id="{5BCAD085-E8A6-8845-BD4E-CB4CCA059FC4}" type="datetimeFigureOut">
               <a:rPr lang="en-US" smtClean="0"/>
-              <a:t>5/15/26</a:t>
+              <a:t>5/18/26</a:t>
             </a:fld>
             <a:endParaRPr lang="en-US"/>
           </a:p>
@@ -2132,7 +2132,7 @@
           <a:p>
             <a:fld id="{5BCAD085-E8A6-8845-BD4E-CB4CCA059FC4}" type="datetimeFigureOut">
               <a:rPr lang="en-US" smtClean="0"/>
-              <a:t>5/15/26</a:t>
+              <a:t>5/18/26</a:t>
             </a:fld>
             <a:endParaRPr lang="en-US"/>
           </a:p>
@@ -2300,7 +2300,7 @@
           <a:p>
             <a:fld id="{5BCAD085-E8A6-8845-BD4E-CB4CCA059FC4}" type="datetimeFigureOut">
               <a:rPr lang="en-US" smtClean="0"/>
-              <a:t>5/15/26</a:t>
+              <a:t>5/18/26</a:t>
             </a:fld>
             <a:endParaRPr lang="en-US"/>
           </a:p>
@@ -2545,7 +2545,7 @@
           <a:p>
             <a:fld id="{5BCAD085-E8A6-8845-BD4E-CB4CCA059FC4}" type="datetimeFigureOut">
               <a:rPr lang="en-US" smtClean="0"/>
-              <a:t>5/15/26</a:t>
+              <a:t>5/18/26</a:t>
             </a:fld>
             <a:endParaRPr lang="en-US"/>
           </a:p>
@@ -2830,7 +2830,7 @@
           <a:p>
             <a:fld id="{5BCAD085-E8A6-8845-BD4E-CB4CCA059FC4}" type="datetimeFigureOut">
               <a:rPr lang="en-US" smtClean="0"/>
-              <a:t>5/15/26</a:t>
+              <a:t>5/18/26</a:t>
             </a:fld>
             <a:endParaRPr lang="en-US"/>
           </a:p>
@@ -3249,7 +3249,7 @@
           <a:p>
             <a:fld id="{5BCAD085-E8A6-8845-BD4E-CB4CCA059FC4}" type="datetimeFigureOut">
               <a:rPr lang="en-US" smtClean="0"/>
-              <a:t>5/15/26</a:t>
+              <a:t>5/18/26</a:t>
             </a:fld>
             <a:endParaRPr lang="en-US"/>
           </a:p>
@@ -3366,7 +3366,7 @@
           <a:p>
             <a:fld id="{5BCAD085-E8A6-8845-BD4E-CB4CCA059FC4}" type="datetimeFigureOut">
               <a:rPr lang="en-US" smtClean="0"/>
-              <a:t>5/15/26</a:t>
+              <a:t>5/18/26</a:t>
             </a:fld>
             <a:endParaRPr lang="en-US"/>
           </a:p>
@@ -3461,7 +3461,7 @@
           <a:p>
             <a:fld id="{5BCAD085-E8A6-8845-BD4E-CB4CCA059FC4}" type="datetimeFigureOut">
               <a:rPr lang="en-US" smtClean="0"/>
-              <a:t>5/15/26</a:t>
+              <a:t>5/18/26</a:t>
             </a:fld>
             <a:endParaRPr lang="en-US"/>
           </a:p>
@@ -3736,7 +3736,7 @@
           <a:p>
             <a:fld id="{5BCAD085-E8A6-8845-BD4E-CB4CCA059FC4}" type="datetimeFigureOut">
               <a:rPr lang="en-US" smtClean="0"/>
-              <a:t>5/15/26</a:t>
+              <a:t>5/18/26</a:t>
             </a:fld>
             <a:endParaRPr lang="en-US"/>
           </a:p>
@@ -3988,7 +3988,7 @@
           <a:p>
             <a:fld id="{5BCAD085-E8A6-8845-BD4E-CB4CCA059FC4}" type="datetimeFigureOut">
               <a:rPr lang="en-US" smtClean="0"/>
-              <a:t>5/15/26</a:t>
+              <a:t>5/18/26</a:t>
             </a:fld>
             <a:endParaRPr lang="en-US"/>
           </a:p>
@@ -4199,7 +4199,7 @@
           <a:p>
             <a:fld id="{5BCAD085-E8A6-8845-BD4E-CB4CCA059FC4}" type="datetimeFigureOut">
               <a:rPr lang="en-US" smtClean="0"/>
-              <a:t>5/15/26</a:t>
+              <a:t>5/18/26</a:t>
             </a:fld>
             <a:endParaRPr lang="en-US"/>
           </a:p>
@@ -18221,8 +18221,8 @@
         </p:nvSpPr>
         <p:spPr>
           <a:xfrm>
-            <a:off x="8467344" y="3730752"/>
-            <a:ext cx="3154680" cy="932688"/>
+            <a:off x="8467344" y="3383280"/>
+            <a:ext cx="3154680" cy="1280160"/>
           </a:xfrm>
           <a:prstGeom prst="rect">
             <a:avLst/>
@@ -19459,7 +19459,7 @@
           <a:lstStyle/>
           <a:p>
             <a:pPr algn="ctr"/>
-            <a:endParaRPr/>
+            <a:endParaRPr dirty="0"/>
           </a:p>
         </p:txBody>
       </p:sp>

--- a/Comp_Vis_slides.pptx
+++ b/Comp_Vis_slides.pptx
@@ -17206,7 +17206,7 @@
               </a:lnSpc>
             </a:pPr>
             <a:r>
-              <a:rPr sz="4400" b="0" i="0">
+              <a:rPr sz="4400" b="0" i="0" dirty="0">
                 <a:solidFill>
                   <a:srgbClr val="1A1A1A"/>
                 </a:solidFill>
@@ -17215,7 +17215,7 @@
               <a:t>Submerge the terrain from </a:t>
             </a:r>
             <a:r>
-              <a:rPr sz="4400" b="0" i="1">
+              <a:rPr sz="4400" b="0" i="1" dirty="0">
                 <a:solidFill>
                   <a:srgbClr val="1A1A1A"/>
                 </a:solidFill>
@@ -17315,330 +17315,6 @@
       </p:sp>
       <p:sp>
         <p:nvSpPr>
-          <p:cNvPr id="10" name="Rectangle 9"/>
-          <p:cNvSpPr/>
-          <p:nvPr/>
-        </p:nvSpPr>
-        <p:spPr>
-          <a:xfrm>
-            <a:off x="822960" y="4279392"/>
-            <a:ext cx="3154680" cy="384048"/>
-          </a:xfrm>
-          <a:prstGeom prst="rect">
-            <a:avLst/>
-          </a:prstGeom>
-          <a:solidFill>
-            <a:srgbClr val="8EB1CC"/>
-          </a:solidFill>
-          <a:ln>
-            <a:noFill/>
-          </a:ln>
-        </p:spPr>
-        <p:style>
-          <a:lnRef idx="1">
-            <a:schemeClr val="accent1"/>
-          </a:lnRef>
-          <a:fillRef idx="3">
-            <a:schemeClr val="accent1"/>
-          </a:fillRef>
-          <a:effectRef idx="2">
-            <a:schemeClr val="accent1"/>
-          </a:effectRef>
-          <a:fontRef idx="minor">
-            <a:schemeClr val="lt1"/>
-          </a:fontRef>
-        </p:style>
-        <p:txBody>
-          <a:bodyPr rtlCol="0" anchor="ctr"/>
-          <a:lstStyle/>
-          <a:p>
-            <a:pPr algn="ctr"/>
-            <a:endParaRPr/>
-          </a:p>
-        </p:txBody>
-      </p:sp>
-      <p:cxnSp>
-        <p:nvCxnSpPr>
-          <p:cNvPr id="11" name="Connector 10"/>
-          <p:cNvCxnSpPr/>
-          <p:nvPr/>
-        </p:nvCxnSpPr>
-        <p:spPr>
-          <a:xfrm flipV="1">
-            <a:off x="822960" y="3771899"/>
-            <a:ext cx="567842" cy="891541"/>
-          </a:xfrm>
-          <a:prstGeom prst="line">
-            <a:avLst/>
-          </a:prstGeom>
-          <a:ln w="19050">
-            <a:solidFill>
-              <a:srgbClr val="1A1A1A"/>
-            </a:solidFill>
-          </a:ln>
-        </p:spPr>
-        <p:style>
-          <a:lnRef idx="2">
-            <a:schemeClr val="accent1"/>
-          </a:lnRef>
-          <a:fillRef idx="0">
-            <a:schemeClr val="accent1"/>
-          </a:fillRef>
-          <a:effectRef idx="1">
-            <a:schemeClr val="accent1"/>
-          </a:effectRef>
-          <a:fontRef idx="minor">
-            <a:schemeClr val="tx1"/>
-          </a:fontRef>
-        </p:style>
-      </p:cxnSp>
-      <p:cxnSp>
-        <p:nvCxnSpPr>
-          <p:cNvPr id="12" name="Connector 11"/>
-          <p:cNvCxnSpPr/>
-          <p:nvPr/>
-        </p:nvCxnSpPr>
-        <p:spPr>
-          <a:xfrm flipV="1">
-            <a:off x="1390802" y="3360420"/>
-            <a:ext cx="378562" cy="411479"/>
-          </a:xfrm>
-          <a:prstGeom prst="line">
-            <a:avLst/>
-          </a:prstGeom>
-          <a:ln w="19050">
-            <a:solidFill>
-              <a:srgbClr val="1A1A1A"/>
-            </a:solidFill>
-          </a:ln>
-        </p:spPr>
-        <p:style>
-          <a:lnRef idx="2">
-            <a:schemeClr val="accent1"/>
-          </a:lnRef>
-          <a:fillRef idx="0">
-            <a:schemeClr val="accent1"/>
-          </a:fillRef>
-          <a:effectRef idx="1">
-            <a:schemeClr val="accent1"/>
-          </a:effectRef>
-          <a:fontRef idx="minor">
-            <a:schemeClr val="tx1"/>
-          </a:fontRef>
-        </p:style>
-      </p:cxnSp>
-      <p:cxnSp>
-        <p:nvCxnSpPr>
-          <p:cNvPr id="13" name="Connector 12"/>
-          <p:cNvCxnSpPr/>
-          <p:nvPr/>
-        </p:nvCxnSpPr>
-        <p:spPr>
-          <a:xfrm>
-            <a:off x="1769364" y="3360420"/>
-            <a:ext cx="378561" cy="617220"/>
-          </a:xfrm>
-          <a:prstGeom prst="line">
-            <a:avLst/>
-          </a:prstGeom>
-          <a:ln w="19050">
-            <a:solidFill>
-              <a:srgbClr val="1A1A1A"/>
-            </a:solidFill>
-          </a:ln>
-        </p:spPr>
-        <p:style>
-          <a:lnRef idx="2">
-            <a:schemeClr val="accent1"/>
-          </a:lnRef>
-          <a:fillRef idx="0">
-            <a:schemeClr val="accent1"/>
-          </a:fillRef>
-          <a:effectRef idx="1">
-            <a:schemeClr val="accent1"/>
-          </a:effectRef>
-          <a:fontRef idx="minor">
-            <a:schemeClr val="tx1"/>
-          </a:fontRef>
-        </p:style>
-      </p:cxnSp>
-      <p:cxnSp>
-        <p:nvCxnSpPr>
-          <p:cNvPr id="14" name="Connector 13"/>
-          <p:cNvCxnSpPr/>
-          <p:nvPr/>
-        </p:nvCxnSpPr>
-        <p:spPr>
-          <a:xfrm>
-            <a:off x="2147925" y="3977640"/>
-            <a:ext cx="315468" cy="205740"/>
-          </a:xfrm>
-          <a:prstGeom prst="line">
-            <a:avLst/>
-          </a:prstGeom>
-          <a:ln w="19050">
-            <a:solidFill>
-              <a:srgbClr val="1A1A1A"/>
-            </a:solidFill>
-          </a:ln>
-        </p:spPr>
-        <p:style>
-          <a:lnRef idx="2">
-            <a:schemeClr val="accent1"/>
-          </a:lnRef>
-          <a:fillRef idx="0">
-            <a:schemeClr val="accent1"/>
-          </a:fillRef>
-          <a:effectRef idx="1">
-            <a:schemeClr val="accent1"/>
-          </a:effectRef>
-          <a:fontRef idx="minor">
-            <a:schemeClr val="tx1"/>
-          </a:fontRef>
-        </p:style>
-      </p:cxnSp>
-      <p:cxnSp>
-        <p:nvCxnSpPr>
-          <p:cNvPr id="15" name="Connector 14"/>
-          <p:cNvCxnSpPr/>
-          <p:nvPr/>
-        </p:nvCxnSpPr>
-        <p:spPr>
-          <a:xfrm flipV="1">
-            <a:off x="2463393" y="3703320"/>
-            <a:ext cx="315468" cy="480060"/>
-          </a:xfrm>
-          <a:prstGeom prst="line">
-            <a:avLst/>
-          </a:prstGeom>
-          <a:ln w="19050">
-            <a:solidFill>
-              <a:srgbClr val="1A1A1A"/>
-            </a:solidFill>
-          </a:ln>
-        </p:spPr>
-        <p:style>
-          <a:lnRef idx="2">
-            <a:schemeClr val="accent1"/>
-          </a:lnRef>
-          <a:fillRef idx="0">
-            <a:schemeClr val="accent1"/>
-          </a:fillRef>
-          <a:effectRef idx="1">
-            <a:schemeClr val="accent1"/>
-          </a:effectRef>
-          <a:fontRef idx="minor">
-            <a:schemeClr val="tx1"/>
-          </a:fontRef>
-        </p:style>
-      </p:cxnSp>
-      <p:cxnSp>
-        <p:nvCxnSpPr>
-          <p:cNvPr id="16" name="Connector 15"/>
-          <p:cNvCxnSpPr/>
-          <p:nvPr/>
-        </p:nvCxnSpPr>
-        <p:spPr>
-          <a:xfrm flipV="1">
-            <a:off x="2778861" y="3360420"/>
-            <a:ext cx="315468" cy="342900"/>
-          </a:xfrm>
-          <a:prstGeom prst="line">
-            <a:avLst/>
-          </a:prstGeom>
-          <a:ln w="19050">
-            <a:solidFill>
-              <a:srgbClr val="1A1A1A"/>
-            </a:solidFill>
-          </a:ln>
-        </p:spPr>
-        <p:style>
-          <a:lnRef idx="2">
-            <a:schemeClr val="accent1"/>
-          </a:lnRef>
-          <a:fillRef idx="0">
-            <a:schemeClr val="accent1"/>
-          </a:fillRef>
-          <a:effectRef idx="1">
-            <a:schemeClr val="accent1"/>
-          </a:effectRef>
-          <a:fontRef idx="minor">
-            <a:schemeClr val="tx1"/>
-          </a:fontRef>
-        </p:style>
-      </p:cxnSp>
-      <p:cxnSp>
-        <p:nvCxnSpPr>
-          <p:cNvPr id="17" name="Connector 16"/>
-          <p:cNvCxnSpPr/>
-          <p:nvPr/>
-        </p:nvCxnSpPr>
-        <p:spPr>
-          <a:xfrm>
-            <a:off x="3094329" y="3360420"/>
-            <a:ext cx="378562" cy="685800"/>
-          </a:xfrm>
-          <a:prstGeom prst="line">
-            <a:avLst/>
-          </a:prstGeom>
-          <a:ln w="19050">
-            <a:solidFill>
-              <a:srgbClr val="1A1A1A"/>
-            </a:solidFill>
-          </a:ln>
-        </p:spPr>
-        <p:style>
-          <a:lnRef idx="2">
-            <a:schemeClr val="accent1"/>
-          </a:lnRef>
-          <a:fillRef idx="0">
-            <a:schemeClr val="accent1"/>
-          </a:fillRef>
-          <a:effectRef idx="1">
-            <a:schemeClr val="accent1"/>
-          </a:effectRef>
-          <a:fontRef idx="minor">
-            <a:schemeClr val="tx1"/>
-          </a:fontRef>
-        </p:style>
-      </p:cxnSp>
-      <p:cxnSp>
-        <p:nvCxnSpPr>
-          <p:cNvPr id="18" name="Connector 17"/>
-          <p:cNvCxnSpPr/>
-          <p:nvPr/>
-        </p:nvCxnSpPr>
-        <p:spPr>
-          <a:xfrm>
-            <a:off x="3472891" y="4046220"/>
-            <a:ext cx="504749" cy="548640"/>
-          </a:xfrm>
-          <a:prstGeom prst="line">
-            <a:avLst/>
-          </a:prstGeom>
-          <a:ln w="19050">
-            <a:solidFill>
-              <a:srgbClr val="1A1A1A"/>
-            </a:solidFill>
-          </a:ln>
-        </p:spPr>
-        <p:style>
-          <a:lnRef idx="2">
-            <a:schemeClr val="accent1"/>
-          </a:lnRef>
-          <a:fillRef idx="0">
-            <a:schemeClr val="accent1"/>
-          </a:fillRef>
-          <a:effectRef idx="1">
-            <a:schemeClr val="accent1"/>
-          </a:effectRef>
-          <a:fontRef idx="minor">
-            <a:schemeClr val="tx1"/>
-          </a:fontRef>
-        </p:style>
-      </p:cxnSp>
-      <p:sp>
-        <p:nvSpPr>
           <p:cNvPr id="19" name="TextBox 18"/>
           <p:cNvSpPr txBox="1"/>
           <p:nvPr/>
@@ -17665,7 +17341,7 @@
               </a:lnSpc>
             </a:pPr>
             <a:r>
-              <a:rPr sz="1200" b="0" i="1">
+              <a:rPr sz="1200" b="0" i="1" dirty="0">
                 <a:solidFill>
                   <a:srgbClr val="2C2C2C"/>
                 </a:solidFill>
@@ -17765,330 +17441,6 @@
       </p:sp>
       <p:sp>
         <p:nvSpPr>
-          <p:cNvPr id="22" name="Rectangle 21"/>
-          <p:cNvSpPr/>
-          <p:nvPr/>
-        </p:nvSpPr>
-        <p:spPr>
-          <a:xfrm>
-            <a:off x="4645152" y="3977640"/>
-            <a:ext cx="3154680" cy="685800"/>
-          </a:xfrm>
-          <a:prstGeom prst="rect">
-            <a:avLst/>
-          </a:prstGeom>
-          <a:solidFill>
-            <a:srgbClr val="8EB1CC"/>
-          </a:solidFill>
-          <a:ln>
-            <a:noFill/>
-          </a:ln>
-        </p:spPr>
-        <p:style>
-          <a:lnRef idx="1">
-            <a:schemeClr val="accent1"/>
-          </a:lnRef>
-          <a:fillRef idx="3">
-            <a:schemeClr val="accent1"/>
-          </a:fillRef>
-          <a:effectRef idx="2">
-            <a:schemeClr val="accent1"/>
-          </a:effectRef>
-          <a:fontRef idx="minor">
-            <a:schemeClr val="lt1"/>
-          </a:fontRef>
-        </p:style>
-        <p:txBody>
-          <a:bodyPr rtlCol="0" anchor="ctr"/>
-          <a:lstStyle/>
-          <a:p>
-            <a:pPr algn="ctr"/>
-            <a:endParaRPr/>
-          </a:p>
-        </p:txBody>
-      </p:sp>
-      <p:cxnSp>
-        <p:nvCxnSpPr>
-          <p:cNvPr id="23" name="Connector 22"/>
-          <p:cNvCxnSpPr/>
-          <p:nvPr/>
-        </p:nvCxnSpPr>
-        <p:spPr>
-          <a:xfrm flipV="1">
-            <a:off x="4645152" y="3771899"/>
-            <a:ext cx="567842" cy="891541"/>
-          </a:xfrm>
-          <a:prstGeom prst="line">
-            <a:avLst/>
-          </a:prstGeom>
-          <a:ln w="19050">
-            <a:solidFill>
-              <a:srgbClr val="1A1A1A"/>
-            </a:solidFill>
-          </a:ln>
-        </p:spPr>
-        <p:style>
-          <a:lnRef idx="2">
-            <a:schemeClr val="accent1"/>
-          </a:lnRef>
-          <a:fillRef idx="0">
-            <a:schemeClr val="accent1"/>
-          </a:fillRef>
-          <a:effectRef idx="1">
-            <a:schemeClr val="accent1"/>
-          </a:effectRef>
-          <a:fontRef idx="minor">
-            <a:schemeClr val="tx1"/>
-          </a:fontRef>
-        </p:style>
-      </p:cxnSp>
-      <p:cxnSp>
-        <p:nvCxnSpPr>
-          <p:cNvPr id="24" name="Connector 23"/>
-          <p:cNvCxnSpPr/>
-          <p:nvPr/>
-        </p:nvCxnSpPr>
-        <p:spPr>
-          <a:xfrm flipV="1">
-            <a:off x="5212994" y="3360420"/>
-            <a:ext cx="378562" cy="411479"/>
-          </a:xfrm>
-          <a:prstGeom prst="line">
-            <a:avLst/>
-          </a:prstGeom>
-          <a:ln w="19050">
-            <a:solidFill>
-              <a:srgbClr val="1A1A1A"/>
-            </a:solidFill>
-          </a:ln>
-        </p:spPr>
-        <p:style>
-          <a:lnRef idx="2">
-            <a:schemeClr val="accent1"/>
-          </a:lnRef>
-          <a:fillRef idx="0">
-            <a:schemeClr val="accent1"/>
-          </a:fillRef>
-          <a:effectRef idx="1">
-            <a:schemeClr val="accent1"/>
-          </a:effectRef>
-          <a:fontRef idx="minor">
-            <a:schemeClr val="tx1"/>
-          </a:fontRef>
-        </p:style>
-      </p:cxnSp>
-      <p:cxnSp>
-        <p:nvCxnSpPr>
-          <p:cNvPr id="25" name="Connector 24"/>
-          <p:cNvCxnSpPr/>
-          <p:nvPr/>
-        </p:nvCxnSpPr>
-        <p:spPr>
-          <a:xfrm>
-            <a:off x="5591556" y="3360420"/>
-            <a:ext cx="378561" cy="617220"/>
-          </a:xfrm>
-          <a:prstGeom prst="line">
-            <a:avLst/>
-          </a:prstGeom>
-          <a:ln w="19050">
-            <a:solidFill>
-              <a:srgbClr val="1A1A1A"/>
-            </a:solidFill>
-          </a:ln>
-        </p:spPr>
-        <p:style>
-          <a:lnRef idx="2">
-            <a:schemeClr val="accent1"/>
-          </a:lnRef>
-          <a:fillRef idx="0">
-            <a:schemeClr val="accent1"/>
-          </a:fillRef>
-          <a:effectRef idx="1">
-            <a:schemeClr val="accent1"/>
-          </a:effectRef>
-          <a:fontRef idx="minor">
-            <a:schemeClr val="tx1"/>
-          </a:fontRef>
-        </p:style>
-      </p:cxnSp>
-      <p:cxnSp>
-        <p:nvCxnSpPr>
-          <p:cNvPr id="26" name="Connector 25"/>
-          <p:cNvCxnSpPr/>
-          <p:nvPr/>
-        </p:nvCxnSpPr>
-        <p:spPr>
-          <a:xfrm>
-            <a:off x="5970117" y="3977640"/>
-            <a:ext cx="315468" cy="205740"/>
-          </a:xfrm>
-          <a:prstGeom prst="line">
-            <a:avLst/>
-          </a:prstGeom>
-          <a:ln w="19050">
-            <a:solidFill>
-              <a:srgbClr val="1A1A1A"/>
-            </a:solidFill>
-          </a:ln>
-        </p:spPr>
-        <p:style>
-          <a:lnRef idx="2">
-            <a:schemeClr val="accent1"/>
-          </a:lnRef>
-          <a:fillRef idx="0">
-            <a:schemeClr val="accent1"/>
-          </a:fillRef>
-          <a:effectRef idx="1">
-            <a:schemeClr val="accent1"/>
-          </a:effectRef>
-          <a:fontRef idx="minor">
-            <a:schemeClr val="tx1"/>
-          </a:fontRef>
-        </p:style>
-      </p:cxnSp>
-      <p:cxnSp>
-        <p:nvCxnSpPr>
-          <p:cNvPr id="27" name="Connector 26"/>
-          <p:cNvCxnSpPr/>
-          <p:nvPr/>
-        </p:nvCxnSpPr>
-        <p:spPr>
-          <a:xfrm flipV="1">
-            <a:off x="6285585" y="3703320"/>
-            <a:ext cx="315468" cy="480060"/>
-          </a:xfrm>
-          <a:prstGeom prst="line">
-            <a:avLst/>
-          </a:prstGeom>
-          <a:ln w="19050">
-            <a:solidFill>
-              <a:srgbClr val="1A1A1A"/>
-            </a:solidFill>
-          </a:ln>
-        </p:spPr>
-        <p:style>
-          <a:lnRef idx="2">
-            <a:schemeClr val="accent1"/>
-          </a:lnRef>
-          <a:fillRef idx="0">
-            <a:schemeClr val="accent1"/>
-          </a:fillRef>
-          <a:effectRef idx="1">
-            <a:schemeClr val="accent1"/>
-          </a:effectRef>
-          <a:fontRef idx="minor">
-            <a:schemeClr val="tx1"/>
-          </a:fontRef>
-        </p:style>
-      </p:cxnSp>
-      <p:cxnSp>
-        <p:nvCxnSpPr>
-          <p:cNvPr id="28" name="Connector 27"/>
-          <p:cNvCxnSpPr/>
-          <p:nvPr/>
-        </p:nvCxnSpPr>
-        <p:spPr>
-          <a:xfrm flipV="1">
-            <a:off x="6601053" y="3360420"/>
-            <a:ext cx="315468" cy="342900"/>
-          </a:xfrm>
-          <a:prstGeom prst="line">
-            <a:avLst/>
-          </a:prstGeom>
-          <a:ln w="19050">
-            <a:solidFill>
-              <a:srgbClr val="1A1A1A"/>
-            </a:solidFill>
-          </a:ln>
-        </p:spPr>
-        <p:style>
-          <a:lnRef idx="2">
-            <a:schemeClr val="accent1"/>
-          </a:lnRef>
-          <a:fillRef idx="0">
-            <a:schemeClr val="accent1"/>
-          </a:fillRef>
-          <a:effectRef idx="1">
-            <a:schemeClr val="accent1"/>
-          </a:effectRef>
-          <a:fontRef idx="minor">
-            <a:schemeClr val="tx1"/>
-          </a:fontRef>
-        </p:style>
-      </p:cxnSp>
-      <p:cxnSp>
-        <p:nvCxnSpPr>
-          <p:cNvPr id="29" name="Connector 28"/>
-          <p:cNvCxnSpPr/>
-          <p:nvPr/>
-        </p:nvCxnSpPr>
-        <p:spPr>
-          <a:xfrm>
-            <a:off x="6916521" y="3360420"/>
-            <a:ext cx="378562" cy="685800"/>
-          </a:xfrm>
-          <a:prstGeom prst="line">
-            <a:avLst/>
-          </a:prstGeom>
-          <a:ln w="19050">
-            <a:solidFill>
-              <a:srgbClr val="1A1A1A"/>
-            </a:solidFill>
-          </a:ln>
-        </p:spPr>
-        <p:style>
-          <a:lnRef idx="2">
-            <a:schemeClr val="accent1"/>
-          </a:lnRef>
-          <a:fillRef idx="0">
-            <a:schemeClr val="accent1"/>
-          </a:fillRef>
-          <a:effectRef idx="1">
-            <a:schemeClr val="accent1"/>
-          </a:effectRef>
-          <a:fontRef idx="minor">
-            <a:schemeClr val="tx1"/>
-          </a:fontRef>
-        </p:style>
-      </p:cxnSp>
-      <p:cxnSp>
-        <p:nvCxnSpPr>
-          <p:cNvPr id="30" name="Connector 29"/>
-          <p:cNvCxnSpPr/>
-          <p:nvPr/>
-        </p:nvCxnSpPr>
-        <p:spPr>
-          <a:xfrm>
-            <a:off x="7295083" y="4046220"/>
-            <a:ext cx="504749" cy="548640"/>
-          </a:xfrm>
-          <a:prstGeom prst="line">
-            <a:avLst/>
-          </a:prstGeom>
-          <a:ln w="19050">
-            <a:solidFill>
-              <a:srgbClr val="1A1A1A"/>
-            </a:solidFill>
-          </a:ln>
-        </p:spPr>
-        <p:style>
-          <a:lnRef idx="2">
-            <a:schemeClr val="accent1"/>
-          </a:lnRef>
-          <a:fillRef idx="0">
-            <a:schemeClr val="accent1"/>
-          </a:fillRef>
-          <a:effectRef idx="1">
-            <a:schemeClr val="accent1"/>
-          </a:effectRef>
-          <a:fontRef idx="minor">
-            <a:schemeClr val="tx1"/>
-          </a:fontRef>
-        </p:style>
-      </p:cxnSp>
-      <p:sp>
-        <p:nvSpPr>
           <p:cNvPr id="31" name="TextBox 30"/>
           <p:cNvSpPr txBox="1"/>
           <p:nvPr/>
@@ -18215,65 +17567,50 @@
       </p:sp>
       <p:sp>
         <p:nvSpPr>
-          <p:cNvPr id="34" name="Rectangle 33"/>
-          <p:cNvSpPr/>
-          <p:nvPr/>
-        </p:nvSpPr>
-        <p:spPr>
-          <a:xfrm>
-            <a:off x="8467344" y="3383280"/>
-            <a:ext cx="3154680" cy="1280160"/>
-          </a:xfrm>
-          <a:prstGeom prst="rect">
-            <a:avLst/>
-          </a:prstGeom>
-          <a:solidFill>
-            <a:srgbClr val="8EB1CC"/>
-          </a:solidFill>
-          <a:ln>
-            <a:noFill/>
-          </a:ln>
-        </p:spPr>
-        <p:style>
-          <a:lnRef idx="1">
-            <a:schemeClr val="accent1"/>
-          </a:lnRef>
-          <a:fillRef idx="3">
-            <a:schemeClr val="accent1"/>
-          </a:fillRef>
-          <a:effectRef idx="2">
-            <a:schemeClr val="accent1"/>
-          </a:effectRef>
-          <a:fontRef idx="minor">
-            <a:schemeClr val="lt1"/>
-          </a:fontRef>
-        </p:style>
-        <p:txBody>
-          <a:bodyPr rtlCol="0" anchor="ctr"/>
-          <a:lstStyle/>
-          <a:p>
-            <a:pPr algn="ctr"/>
-            <a:endParaRPr/>
+          <p:cNvPr id="45" name="TextBox 44"/>
+          <p:cNvSpPr txBox="1"/>
+          <p:nvPr/>
+        </p:nvSpPr>
+        <p:spPr>
+          <a:xfrm>
+            <a:off x="8421624" y="4617720"/>
+            <a:ext cx="3246120" cy="406265"/>
+          </a:xfrm>
+          <a:prstGeom prst="rect">
+            <a:avLst/>
+          </a:prstGeom>
+          <a:noFill/>
+        </p:spPr>
+        <p:txBody>
+          <a:bodyPr wrap="square" lIns="0" tIns="18288" rIns="0" bIns="18288" anchor="t">
+            <a:spAutoFit/>
+          </a:bodyPr>
+          <a:lstStyle/>
+          <a:p>
+            <a:r>
+              <a:rPr lang="en-GB" sz="1200" dirty="0"/>
+              <a:t>Dams are built where neighbouring basins would touch becoming the watershed boundaries</a:t>
+            </a:r>
           </a:p>
         </p:txBody>
       </p:sp>
       <p:cxnSp>
         <p:nvCxnSpPr>
-          <p:cNvPr id="35" name="Connector 34"/>
+          <p:cNvPr id="46" name="Connector 45"/>
           <p:cNvCxnSpPr/>
           <p:nvPr/>
         </p:nvCxnSpPr>
         <p:spPr>
-          <a:xfrm flipV="1">
-            <a:off x="8467344" y="3771899"/>
-            <a:ext cx="567842" cy="891541"/>
+          <a:xfrm>
+            <a:off x="548640" y="5532120"/>
+            <a:ext cx="11091672" cy="0"/>
           </a:xfrm>
           <a:prstGeom prst="line">
             <a:avLst/>
           </a:prstGeom>
-          <a:ln w="19050">
+          <a:ln w="6350">
             <a:solidFill>
-              <a:srgbClr val="1A1A1A"/>
+              <a:srgbClr val="D4D1CA"/>
             </a:solidFill>
           </a:ln>
         </p:spPr>
@@ -18292,399 +17629,6 @@
           </a:fontRef>
         </p:style>
       </p:cxnSp>
-      <p:cxnSp>
-        <p:nvCxnSpPr>
-          <p:cNvPr id="36" name="Connector 35"/>
-          <p:cNvCxnSpPr/>
-          <p:nvPr/>
-        </p:nvCxnSpPr>
-        <p:spPr>
-          <a:xfrm flipV="1">
-            <a:off x="9035186" y="3360420"/>
-            <a:ext cx="378562" cy="411479"/>
-          </a:xfrm>
-          <a:prstGeom prst="line">
-            <a:avLst/>
-          </a:prstGeom>
-          <a:ln w="19050">
-            <a:solidFill>
-              <a:srgbClr val="1A1A1A"/>
-            </a:solidFill>
-          </a:ln>
-        </p:spPr>
-        <p:style>
-          <a:lnRef idx="2">
-            <a:schemeClr val="accent1"/>
-          </a:lnRef>
-          <a:fillRef idx="0">
-            <a:schemeClr val="accent1"/>
-          </a:fillRef>
-          <a:effectRef idx="1">
-            <a:schemeClr val="accent1"/>
-          </a:effectRef>
-          <a:fontRef idx="minor">
-            <a:schemeClr val="tx1"/>
-          </a:fontRef>
-        </p:style>
-      </p:cxnSp>
-      <p:cxnSp>
-        <p:nvCxnSpPr>
-          <p:cNvPr id="37" name="Connector 36"/>
-          <p:cNvCxnSpPr/>
-          <p:nvPr/>
-        </p:nvCxnSpPr>
-        <p:spPr>
-          <a:xfrm>
-            <a:off x="9413748" y="3360420"/>
-            <a:ext cx="378561" cy="617220"/>
-          </a:xfrm>
-          <a:prstGeom prst="line">
-            <a:avLst/>
-          </a:prstGeom>
-          <a:ln w="19050">
-            <a:solidFill>
-              <a:srgbClr val="1A1A1A"/>
-            </a:solidFill>
-          </a:ln>
-        </p:spPr>
-        <p:style>
-          <a:lnRef idx="2">
-            <a:schemeClr val="accent1"/>
-          </a:lnRef>
-          <a:fillRef idx="0">
-            <a:schemeClr val="accent1"/>
-          </a:fillRef>
-          <a:effectRef idx="1">
-            <a:schemeClr val="accent1"/>
-          </a:effectRef>
-          <a:fontRef idx="minor">
-            <a:schemeClr val="tx1"/>
-          </a:fontRef>
-        </p:style>
-      </p:cxnSp>
-      <p:cxnSp>
-        <p:nvCxnSpPr>
-          <p:cNvPr id="38" name="Connector 37"/>
-          <p:cNvCxnSpPr/>
-          <p:nvPr/>
-        </p:nvCxnSpPr>
-        <p:spPr>
-          <a:xfrm>
-            <a:off x="9792309" y="3977640"/>
-            <a:ext cx="315468" cy="205740"/>
-          </a:xfrm>
-          <a:prstGeom prst="line">
-            <a:avLst/>
-          </a:prstGeom>
-          <a:ln w="19050">
-            <a:solidFill>
-              <a:srgbClr val="1A1A1A"/>
-            </a:solidFill>
-          </a:ln>
-        </p:spPr>
-        <p:style>
-          <a:lnRef idx="2">
-            <a:schemeClr val="accent1"/>
-          </a:lnRef>
-          <a:fillRef idx="0">
-            <a:schemeClr val="accent1"/>
-          </a:fillRef>
-          <a:effectRef idx="1">
-            <a:schemeClr val="accent1"/>
-          </a:effectRef>
-          <a:fontRef idx="minor">
-            <a:schemeClr val="tx1"/>
-          </a:fontRef>
-        </p:style>
-      </p:cxnSp>
-      <p:cxnSp>
-        <p:nvCxnSpPr>
-          <p:cNvPr id="39" name="Connector 38"/>
-          <p:cNvCxnSpPr/>
-          <p:nvPr/>
-        </p:nvCxnSpPr>
-        <p:spPr>
-          <a:xfrm flipV="1">
-            <a:off x="10107777" y="3703320"/>
-            <a:ext cx="315468" cy="480060"/>
-          </a:xfrm>
-          <a:prstGeom prst="line">
-            <a:avLst/>
-          </a:prstGeom>
-          <a:ln w="19050">
-            <a:solidFill>
-              <a:srgbClr val="1A1A1A"/>
-            </a:solidFill>
-          </a:ln>
-        </p:spPr>
-        <p:style>
-          <a:lnRef idx="2">
-            <a:schemeClr val="accent1"/>
-          </a:lnRef>
-          <a:fillRef idx="0">
-            <a:schemeClr val="accent1"/>
-          </a:fillRef>
-          <a:effectRef idx="1">
-            <a:schemeClr val="accent1"/>
-          </a:effectRef>
-          <a:fontRef idx="minor">
-            <a:schemeClr val="tx1"/>
-          </a:fontRef>
-        </p:style>
-      </p:cxnSp>
-      <p:cxnSp>
-        <p:nvCxnSpPr>
-          <p:cNvPr id="40" name="Connector 39"/>
-          <p:cNvCxnSpPr/>
-          <p:nvPr/>
-        </p:nvCxnSpPr>
-        <p:spPr>
-          <a:xfrm flipV="1">
-            <a:off x="10423245" y="3360420"/>
-            <a:ext cx="315468" cy="342900"/>
-          </a:xfrm>
-          <a:prstGeom prst="line">
-            <a:avLst/>
-          </a:prstGeom>
-          <a:ln w="19050">
-            <a:solidFill>
-              <a:srgbClr val="1A1A1A"/>
-            </a:solidFill>
-          </a:ln>
-        </p:spPr>
-        <p:style>
-          <a:lnRef idx="2">
-            <a:schemeClr val="accent1"/>
-          </a:lnRef>
-          <a:fillRef idx="0">
-            <a:schemeClr val="accent1"/>
-          </a:fillRef>
-          <a:effectRef idx="1">
-            <a:schemeClr val="accent1"/>
-          </a:effectRef>
-          <a:fontRef idx="minor">
-            <a:schemeClr val="tx1"/>
-          </a:fontRef>
-        </p:style>
-      </p:cxnSp>
-      <p:cxnSp>
-        <p:nvCxnSpPr>
-          <p:cNvPr id="41" name="Connector 40"/>
-          <p:cNvCxnSpPr/>
-          <p:nvPr/>
-        </p:nvCxnSpPr>
-        <p:spPr>
-          <a:xfrm>
-            <a:off x="10738713" y="3360420"/>
-            <a:ext cx="378562" cy="685800"/>
-          </a:xfrm>
-          <a:prstGeom prst="line">
-            <a:avLst/>
-          </a:prstGeom>
-          <a:ln w="19050">
-            <a:solidFill>
-              <a:srgbClr val="1A1A1A"/>
-            </a:solidFill>
-          </a:ln>
-        </p:spPr>
-        <p:style>
-          <a:lnRef idx="2">
-            <a:schemeClr val="accent1"/>
-          </a:lnRef>
-          <a:fillRef idx="0">
-            <a:schemeClr val="accent1"/>
-          </a:fillRef>
-          <a:effectRef idx="1">
-            <a:schemeClr val="accent1"/>
-          </a:effectRef>
-          <a:fontRef idx="minor">
-            <a:schemeClr val="tx1"/>
-          </a:fontRef>
-        </p:style>
-      </p:cxnSp>
-      <p:cxnSp>
-        <p:nvCxnSpPr>
-          <p:cNvPr id="42" name="Connector 41"/>
-          <p:cNvCxnSpPr/>
-          <p:nvPr/>
-        </p:nvCxnSpPr>
-        <p:spPr>
-          <a:xfrm>
-            <a:off x="11117275" y="4046220"/>
-            <a:ext cx="504749" cy="548640"/>
-          </a:xfrm>
-          <a:prstGeom prst="line">
-            <a:avLst/>
-          </a:prstGeom>
-          <a:ln w="19050">
-            <a:solidFill>
-              <a:srgbClr val="1A1A1A"/>
-            </a:solidFill>
-          </a:ln>
-        </p:spPr>
-        <p:style>
-          <a:lnRef idx="2">
-            <a:schemeClr val="accent1"/>
-          </a:lnRef>
-          <a:fillRef idx="0">
-            <a:schemeClr val="accent1"/>
-          </a:fillRef>
-          <a:effectRef idx="1">
-            <a:schemeClr val="accent1"/>
-          </a:effectRef>
-          <a:fontRef idx="minor">
-            <a:schemeClr val="tx1"/>
-          </a:fontRef>
-        </p:style>
-      </p:cxnSp>
-      <p:cxnSp>
-        <p:nvCxnSpPr>
-          <p:cNvPr id="43" name="Connector 42"/>
-          <p:cNvCxnSpPr/>
-          <p:nvPr/>
-        </p:nvCxnSpPr>
-        <p:spPr>
-          <a:xfrm>
-            <a:off x="10738713" y="3195828"/>
-            <a:ext cx="0" cy="164592"/>
-          </a:xfrm>
-          <a:prstGeom prst="line">
-            <a:avLst/>
-          </a:prstGeom>
-          <a:ln w="38100">
-            <a:solidFill>
-              <a:srgbClr val="A84B2F"/>
-            </a:solidFill>
-          </a:ln>
-        </p:spPr>
-        <p:style>
-          <a:lnRef idx="2">
-            <a:schemeClr val="accent1"/>
-          </a:lnRef>
-          <a:fillRef idx="0">
-            <a:schemeClr val="accent1"/>
-          </a:fillRef>
-          <a:effectRef idx="1">
-            <a:schemeClr val="accent1"/>
-          </a:effectRef>
-          <a:fontRef idx="minor">
-            <a:schemeClr val="tx1"/>
-          </a:fontRef>
-        </p:style>
-      </p:cxnSp>
-      <p:sp>
-        <p:nvSpPr>
-          <p:cNvPr id="44" name="TextBox 43"/>
-          <p:cNvSpPr txBox="1"/>
-          <p:nvPr/>
-        </p:nvSpPr>
-        <p:spPr>
-          <a:xfrm>
-            <a:off x="10372953" y="2921508"/>
-            <a:ext cx="731520" cy="228600"/>
-          </a:xfrm>
-          <a:prstGeom prst="rect">
-            <a:avLst/>
-          </a:prstGeom>
-          <a:noFill/>
-        </p:spPr>
-        <p:txBody>
-          <a:bodyPr wrap="square" lIns="0" tIns="18288" rIns="0" bIns="18288" anchor="t">
-            <a:spAutoFit/>
-          </a:bodyPr>
-          <a:lstStyle/>
-          <a:p>
-            <a:pPr algn="ctr">
-              <a:lnSpc>
-                <a:spcPct val="115000"/>
-              </a:lnSpc>
-            </a:pPr>
-            <a:r>
-              <a:rPr sz="800" b="0" i="0">
-                <a:solidFill>
-                  <a:srgbClr val="A84B2F"/>
-                </a:solidFill>
-                <a:latin typeface="Courier New"/>
-              </a:rPr>
-              <a:t>DAM</a:t>
-            </a:r>
-          </a:p>
-        </p:txBody>
-      </p:sp>
-      <p:sp>
-        <p:nvSpPr>
-          <p:cNvPr id="45" name="TextBox 44"/>
-          <p:cNvSpPr txBox="1"/>
-          <p:nvPr/>
-        </p:nvSpPr>
-        <p:spPr>
-          <a:xfrm>
-            <a:off x="8421624" y="4617720"/>
-            <a:ext cx="3246120" cy="548640"/>
-          </a:xfrm>
-          <a:prstGeom prst="rect">
-            <a:avLst/>
-          </a:prstGeom>
-          <a:noFill/>
-        </p:spPr>
-        <p:txBody>
-          <a:bodyPr wrap="square" lIns="0" tIns="18288" rIns="0" bIns="18288" anchor="t">
-            <a:spAutoFit/>
-          </a:bodyPr>
-          <a:lstStyle/>
-          <a:p>
-            <a:pPr algn="l">
-              <a:lnSpc>
-                <a:spcPct val="135000"/>
-              </a:lnSpc>
-            </a:pPr>
-            <a:r>
-              <a:rPr sz="1200" b="0" i="1">
-                <a:solidFill>
-                  <a:srgbClr val="2C2C2C"/>
-                </a:solidFill>
-                <a:latin typeface="Calibri"/>
-              </a:rPr>
-              <a:t>A 1-pixel dam joins the watershed line.</a:t>
-            </a:r>
-          </a:p>
-        </p:txBody>
-      </p:sp>
-      <p:cxnSp>
-        <p:nvCxnSpPr>
-          <p:cNvPr id="46" name="Connector 45"/>
-          <p:cNvCxnSpPr/>
-          <p:nvPr/>
-        </p:nvCxnSpPr>
-        <p:spPr>
-          <a:xfrm>
-            <a:off x="548640" y="5532120"/>
-            <a:ext cx="11091672" cy="0"/>
-          </a:xfrm>
-          <a:prstGeom prst="line">
-            <a:avLst/>
-          </a:prstGeom>
-          <a:ln w="6350">
-            <a:solidFill>
-              <a:srgbClr val="D4D1CA"/>
-            </a:solidFill>
-          </a:ln>
-        </p:spPr>
-        <p:style>
-          <a:lnRef idx="2">
-            <a:schemeClr val="accent1"/>
-          </a:lnRef>
-          <a:fillRef idx="0">
-            <a:schemeClr val="accent1"/>
-          </a:fillRef>
-          <a:effectRef idx="1">
-            <a:schemeClr val="accent1"/>
-          </a:effectRef>
-          <a:fontRef idx="minor">
-            <a:schemeClr val="tx1"/>
-          </a:fontRef>
-        </p:style>
-      </p:cxnSp>
       <p:sp>
         <p:nvSpPr>
           <p:cNvPr id="47" name="TextBox 46"/>
@@ -18763,6 +17707,96 @@
           </a:p>
         </p:txBody>
       </p:sp>
+      <p:pic>
+        <p:nvPicPr>
+          <p:cNvPr id="49" name="Picture 48">
+            <a:extLst>
+              <a:ext uri="{FF2B5EF4-FFF2-40B4-BE49-F238E27FC236}">
+                <a16:creationId xmlns:a16="http://schemas.microsoft.com/office/drawing/2014/main" id="{7F99BEEC-8510-8A82-7C46-9F69FBA9EFDD}"/>
+              </a:ext>
+            </a:extLst>
+          </p:cNvPr>
+          <p:cNvPicPr>
+            <a:picLocks noChangeAspect="1"/>
+          </p:cNvPicPr>
+          <p:nvPr/>
+        </p:nvPicPr>
+        <p:blipFill>
+          <a:blip r:embed="rId3"/>
+          <a:stretch>
+            <a:fillRect/>
+          </a:stretch>
+        </p:blipFill>
+        <p:spPr>
+          <a:xfrm>
+            <a:off x="777239" y="3089177"/>
+            <a:ext cx="3173883" cy="1528543"/>
+          </a:xfrm>
+          <a:prstGeom prst="rect">
+            <a:avLst/>
+          </a:prstGeom>
+        </p:spPr>
+      </p:pic>
+      <p:pic>
+        <p:nvPicPr>
+          <p:cNvPr id="51" name="Picture 50">
+            <a:extLst>
+              <a:ext uri="{FF2B5EF4-FFF2-40B4-BE49-F238E27FC236}">
+                <a16:creationId xmlns:a16="http://schemas.microsoft.com/office/drawing/2014/main" id="{98C99739-1638-71E4-59E9-770C289A84AF}"/>
+              </a:ext>
+            </a:extLst>
+          </p:cNvPr>
+          <p:cNvPicPr>
+            <a:picLocks noChangeAspect="1"/>
+          </p:cNvPicPr>
+          <p:nvPr/>
+        </p:nvPicPr>
+        <p:blipFill>
+          <a:blip r:embed="rId4"/>
+          <a:stretch>
+            <a:fillRect/>
+          </a:stretch>
+        </p:blipFill>
+        <p:spPr>
+          <a:xfrm>
+            <a:off x="4599432" y="3147865"/>
+            <a:ext cx="3173883" cy="1528543"/>
+          </a:xfrm>
+          <a:prstGeom prst="rect">
+            <a:avLst/>
+          </a:prstGeom>
+        </p:spPr>
+      </p:pic>
+      <p:pic>
+        <p:nvPicPr>
+          <p:cNvPr id="53" name="Picture 52">
+            <a:extLst>
+              <a:ext uri="{FF2B5EF4-FFF2-40B4-BE49-F238E27FC236}">
+                <a16:creationId xmlns:a16="http://schemas.microsoft.com/office/drawing/2014/main" id="{8B6C5C07-6EAA-5050-7155-4A04988220A4}"/>
+              </a:ext>
+            </a:extLst>
+          </p:cNvPr>
+          <p:cNvPicPr>
+            <a:picLocks noChangeAspect="1"/>
+          </p:cNvPicPr>
+          <p:nvPr/>
+        </p:nvPicPr>
+        <p:blipFill>
+          <a:blip r:embed="rId5"/>
+          <a:stretch>
+            <a:fillRect/>
+          </a:stretch>
+        </p:blipFill>
+        <p:spPr>
+          <a:xfrm>
+            <a:off x="8421624" y="3147865"/>
+            <a:ext cx="3160594" cy="1520951"/>
+          </a:xfrm>
+          <a:prstGeom prst="rect">
+            <a:avLst/>
+          </a:prstGeom>
+        </p:spPr>
+      </p:pic>
     </p:spTree>
   </p:cSld>
   <p:clrMapOvr>
